--- a/lecons/USA/Economic Geography/11_USA_ECO_L10_Impacts_of_Agriculture_on_the_Environment.pptx
+++ b/lecons/USA/Economic Geography/11_USA_ECO_L10_Impacts_of_Agriculture_on_the_Environment.pptx
@@ -4073,7 +4073,7 @@
           <a:p>
             <a:r>
               <a:rPr lang="en-US" dirty="0"/>
-              <a:t>For your homework: List farming practices in your area that harm or protect the environment. We shall correct it at the beginning of our next lesson.</a:t>
+              <a:t>For your homework: Name three sources of energy used in your home. We shall correct it at the beginning of our next lesson.</a:t>
             </a:r>
             <a:endParaRPr lang="en-US" dirty="0"/>
           </a:p>
@@ -4161,7 +4161,7 @@
           <a:p>
             <a:r>
               <a:rPr lang="en-US" dirty="0"/>
-              <a:t>Our next lesson will be on Further Study 1: Agricultural Development and Change in Cameroon. Thank you for your attention, and see you next time.</a:t>
+              <a:t>Our next lesson will be on Lesson 11: Energy Resources. Thank you for your attention, and see you next time.</a:t>
             </a:r>
             <a:endParaRPr lang="en-US" dirty="0"/>
           </a:p>
@@ -16450,7 +16450,7 @@
                 <a:ea typeface="Times New Roman" pitchFamily="34" charset="-122"/>
                 <a:cs typeface="Times New Roman" pitchFamily="34" charset="-120"/>
               </a:rPr>
-              <a:t>List farming practices in your area that harm or protect the environment.</a:t>
+              <a:t>Name three sources of energy used in your home.</a:t>
             </a:r>
             <a:endParaRPr lang="en-US" sz="4000" dirty="0"/>
           </a:p>
@@ -16689,7 +16689,7 @@
                 <a:ea typeface="Times New Roman" pitchFamily="34" charset="-122"/>
                 <a:cs typeface="Times New Roman" pitchFamily="34" charset="-120"/>
               </a:rPr>
-              <a:t>Further Study 1: Agricultural Development and Change in Cameroon</a:t>
+              <a:t>Lesson 11: Energy Resources</a:t>
             </a:r>
             <a:endParaRPr lang="en-US" sz="4000" dirty="0"/>
           </a:p>
@@ -19333,7 +19333,7 @@
                           <a:ea typeface="Calibri" pitchFamily="34" charset="-122"/>
                           <a:cs typeface="Calibri" pitchFamily="34" charset="-120"/>
                         </a:rPr>
-                        <a:t>List farming practices in your area that harm or protect the environment.</a:t>
+                        <a:t>Name three sources of energy used in your home.</a:t>
                       </a:r>
                       <a:endParaRPr lang="en-US" sz="1600" dirty="0">
                         <a:latin typeface="Calibri" charset="0"/>
